--- a/202312/MIS41Slide_天野晃.pptx
+++ b/202312/MIS41Slide_天野晃.pptx
@@ -206,7 +206,7 @@
           </a:lstStyle>
           <a:p>
             <a:fld id="{EC76ED7C-0D2F-D44D-81F8-4029A7FBE0FF}" type="datetimeFigureOut">
-              <a:t>2026/7/23</a:t>
+              <a:t>2026/7/28</a:t>
             </a:fld>
             <a:endParaRPr kumimoji="1" lang="ja-JP" altLang="en-US"/>
           </a:p>
@@ -840,7 +840,7 @@
           <a:lstStyle/>
           <a:p>
             <a:fld id="{B6986787-D869-A342-B24E-761DB6FBB920}" type="datetimeFigureOut">
-              <a:t>2026/7/23</a:t>
+              <a:t>2026/7/28</a:t>
             </a:fld>
             <a:endParaRPr kumimoji="1" lang="ja-JP" altLang="en-US"/>
           </a:p>
@@ -1068,7 +1068,7 @@
           <a:lstStyle/>
           <a:p>
             <a:fld id="{B6986787-D869-A342-B24E-761DB6FBB920}" type="datetimeFigureOut">
-              <a:t>2026/7/23</a:t>
+              <a:t>2026/7/28</a:t>
             </a:fld>
             <a:endParaRPr kumimoji="1" lang="ja-JP" altLang="en-US"/>
           </a:p>
@@ -1306,7 +1306,7 @@
           <a:lstStyle/>
           <a:p>
             <a:fld id="{B6986787-D869-A342-B24E-761DB6FBB920}" type="datetimeFigureOut">
-              <a:t>2026/7/23</a:t>
+              <a:t>2026/7/28</a:t>
             </a:fld>
             <a:endParaRPr kumimoji="1" lang="ja-JP" altLang="en-US"/>
           </a:p>
@@ -1534,7 +1534,7 @@
           <a:lstStyle/>
           <a:p>
             <a:fld id="{B6986787-D869-A342-B24E-761DB6FBB920}" type="datetimeFigureOut">
-              <a:t>2026/7/23</a:t>
+              <a:t>2026/7/28</a:t>
             </a:fld>
             <a:endParaRPr kumimoji="1" lang="ja-JP" altLang="en-US"/>
           </a:p>
@@ -1807,7 +1807,7 @@
           <a:lstStyle/>
           <a:p>
             <a:fld id="{B6986787-D869-A342-B24E-761DB6FBB920}" type="datetimeFigureOut">
-              <a:t>2026/7/23</a:t>
+              <a:t>2026/7/28</a:t>
             </a:fld>
             <a:endParaRPr kumimoji="1" lang="ja-JP" altLang="en-US"/>
           </a:p>
@@ -2134,7 +2134,7 @@
           <a:lstStyle/>
           <a:p>
             <a:fld id="{B6986787-D869-A342-B24E-761DB6FBB920}" type="datetimeFigureOut">
-              <a:t>2026/7/23</a:t>
+              <a:t>2026/7/28</a:t>
             </a:fld>
             <a:endParaRPr kumimoji="1" lang="ja-JP" altLang="en-US"/>
           </a:p>
@@ -2608,7 +2608,7 @@
           <a:lstStyle/>
           <a:p>
             <a:fld id="{B6986787-D869-A342-B24E-761DB6FBB920}" type="datetimeFigureOut">
-              <a:t>2026/7/23</a:t>
+              <a:t>2026/7/28</a:t>
             </a:fld>
             <a:endParaRPr kumimoji="1" lang="ja-JP" altLang="en-US"/>
           </a:p>
@@ -2747,7 +2747,7 @@
           <a:lstStyle/>
           <a:p>
             <a:fld id="{B6986787-D869-A342-B24E-761DB6FBB920}" type="datetimeFigureOut">
-              <a:t>2026/7/23</a:t>
+              <a:t>2026/7/28</a:t>
             </a:fld>
             <a:endParaRPr kumimoji="1" lang="ja-JP" altLang="en-US"/>
           </a:p>
@@ -2858,7 +2858,7 @@
           <a:lstStyle/>
           <a:p>
             <a:fld id="{B6986787-D869-A342-B24E-761DB6FBB920}" type="datetimeFigureOut">
-              <a:t>2026/7/23</a:t>
+              <a:t>2026/7/28</a:t>
             </a:fld>
             <a:endParaRPr kumimoji="1" lang="ja-JP" altLang="en-US"/>
           </a:p>
@@ -3199,7 +3199,7 @@
           <a:lstStyle/>
           <a:p>
             <a:fld id="{B6986787-D869-A342-B24E-761DB6FBB920}" type="datetimeFigureOut">
-              <a:t>2026/7/23</a:t>
+              <a:t>2026/7/28</a:t>
             </a:fld>
             <a:endParaRPr kumimoji="1" lang="ja-JP" altLang="en-US"/>
           </a:p>
@@ -3485,7 +3485,7 @@
           <a:lstStyle/>
           <a:p>
             <a:fld id="{B6986787-D869-A342-B24E-761DB6FBB920}" type="datetimeFigureOut">
-              <a:t>2026/7/23</a:t>
+              <a:t>2026/7/28</a:t>
             </a:fld>
             <a:endParaRPr kumimoji="1" lang="ja-JP" altLang="en-US"/>
           </a:p>
@@ -3756,7 +3756,7 @@
           </a:lstStyle>
           <a:p>
             <a:fld id="{B6986787-D869-A342-B24E-761DB6FBB920}" type="datetimeFigureOut">
-              <a:t>2026/7/23</a:t>
+              <a:t>2026/7/28</a:t>
             </a:fld>
             <a:endParaRPr kumimoji="1" lang="ja-JP" altLang="en-US"/>
           </a:p>
@@ -4522,8 +4522,12 @@
               <a:buChar char="•"/>
             </a:pPr>
             <a:r>
-              <a:rPr kumimoji="1" lang="ja-JP" altLang="en-US"/>
-              <a:t>短調増加検知</a:t>
+              <a:rPr lang="ja-JP" altLang="en-US"/>
+              <a:t>単調</a:t>
+            </a:r>
+            <a:r>
+              <a:rPr kumimoji="1" lang="ja-JP" altLang="en-US"/>
+              <a:t>増加検知</a:t>
             </a:r>
             <a:r>
               <a:rPr kumimoji="1" lang="en-US" altLang="ja-JP"/>
@@ -4993,8 +4997,12 @@
               <a:t>*</a:t>
             </a:r>
             <a:r>
+              <a:rPr lang="ja-JP" altLang="en-US" sz="1400"/>
+              <a:t>単調</a:t>
+            </a:r>
+            <a:r>
               <a:rPr kumimoji="1" lang="ja-JP" altLang="en-US" sz="1400"/>
-              <a:t>短調増加を検出すると</a:t>
+              <a:t>増加を検出すると</a:t>
             </a:r>
             <a:r>
               <a:rPr kumimoji="1" lang="en-US" altLang="ja-JP" sz="1400"/>
